--- a/slides-template/TiDB_Customer_Case_Study_Template_16x9.pptx
+++ b/slides-template/TiDB_Customer_Case_Study_Template_16x9.pptx
@@ -4317,7 +4317,7 @@
         <p:spPr>
           <a:xfrm>
             <a:off x="640080" y="1783080"/>
-            <a:ext cx="5303520" cy="2862322"/>
+            <a:ext cx="5303520" cy="2734082"/>
           </a:xfrm>
           <a:prstGeom prst="rect">
             <a:avLst/>
@@ -4342,7 +4342,7 @@
               </a:defRPr>
             </a:pPr>
             <a:r>
-              <a:rPr sz="1650" b="1">
+              <a:rPr sz="1650" b="1" dirty="0">
                 <a:solidFill>
                   <a:srgbClr val="202020"/>
                 </a:solidFill>
@@ -4351,7 +4351,7 @@
               <a:t>25%</a:t>
             </a:r>
             <a:r>
-              <a:rPr sz="1650" b="0">
+              <a:rPr sz="1650" b="0" dirty="0">
                 <a:solidFill>
                   <a:srgbClr val="202020"/>
                 </a:solidFill>
@@ -4362,7 +4362,7 @@
           </a:p>
           <a:p>
             <a:r>
-              <a:rPr sz="1650" b="1">
+              <a:rPr sz="1650" b="1" dirty="0">
                 <a:solidFill>
                   <a:srgbClr val="202020"/>
                 </a:solidFill>
@@ -4371,7 +4371,7 @@
               <a:t>5x</a:t>
             </a:r>
             <a:r>
-              <a:rPr sz="1650" b="0">
+              <a:rPr sz="1650" b="0" dirty="0">
                 <a:solidFill>
                   <a:srgbClr val="202020"/>
                 </a:solidFill>
@@ -4382,7 +4382,7 @@
           </a:p>
           <a:p>
             <a:r>
-              <a:rPr sz="1650" b="1">
+              <a:rPr sz="1650" b="1" dirty="0">
                 <a:solidFill>
                   <a:srgbClr val="202020"/>
                 </a:solidFill>
@@ -4391,18 +4391,36 @@
               <a:t>500k</a:t>
             </a:r>
             <a:r>
-              <a:rPr sz="1650" b="0">
+              <a:rPr sz="1650" b="0" dirty="0">
                 <a:solidFill>
                   <a:srgbClr val="202020"/>
                 </a:solidFill>
                 <a:latin typeface="DM Sans"/>
               </a:rPr>
-              <a:t> queries per second class workloads supported in Plaid storage environment.</a:t>
-            </a:r>
-          </a:p>
-          <a:p>
-            <a:r>
-              <a:rPr sz="1650" b="1">
+              <a:t> queries per second class workloads supported in </a:t>
+            </a:r>
+            <a:r>
+              <a:rPr lang="en-US" sz="1650">
+                <a:solidFill>
+                  <a:srgbClr val="202020"/>
+                </a:solidFill>
+                <a:latin typeface="DM Sans"/>
+              </a:rPr>
+              <a:t>Xxx</a:t>
+            </a:r>
+            <a:r>
+              <a:rPr sz="1650" b="0">
+                <a:solidFill>
+                  <a:srgbClr val="202020"/>
+                </a:solidFill>
+                <a:latin typeface="DM Sans"/>
+              </a:rPr>
+              <a:t> storage environment.</a:t>
+            </a:r>
+          </a:p>
+          <a:p>
+            <a:r>
+              <a:rPr sz="1650" b="1" dirty="0">
                 <a:solidFill>
                   <a:srgbClr val="202020"/>
                 </a:solidFill>
@@ -4411,7 +4429,7 @@
               <a:t>41</a:t>
             </a:r>
             <a:r>
-              <a:rPr sz="1650" b="0">
+              <a:rPr sz="1650" b="0" dirty="0">
                 <a:solidFill>
                   <a:srgbClr val="202020"/>
                 </a:solidFill>
@@ -4422,7 +4440,7 @@
           </a:p>
           <a:p>
             <a:r>
-              <a:rPr sz="1650" b="1">
+              <a:rPr sz="1650" b="1" dirty="0">
                 <a:solidFill>
                   <a:srgbClr val="202020"/>
                 </a:solidFill>
@@ -4431,7 +4449,7 @@
               <a:t>99.995%+</a:t>
             </a:r>
             <a:r>
-              <a:rPr sz="1650" b="0">
+              <a:rPr sz="1650" b="0" dirty="0">
                 <a:solidFill>
                   <a:srgbClr val="202020"/>
                 </a:solidFill>
